--- a/Slides/Topic 4 - Classification.pptx
+++ b/Slides/Topic 4 - Classification.pptx
@@ -160,14 +160,6 @@
           <pc:docMk/>
           <pc:sldMk cId="3761768786" sldId="258"/>
         </pc:sldMkLst>
-        <pc:spChg chg="mod">
-          <ac:chgData name="Javier Bas Vicente" userId="96bf8a96-3310-496c-8c7e-8a087f977faa" providerId="ADAL" clId="{8E23F97C-4D0E-4F0C-8EBD-648EBDCF4A56}" dt="2024-10-31T08:43:48.046" v="3" actId="20577"/>
-          <ac:spMkLst>
-            <pc:docMk/>
-            <pc:sldMk cId="3761768786" sldId="258"/>
-            <ac:spMk id="3" creationId="{068F0C39-44FF-99B2-7103-C6D38F774B5B}"/>
-          </ac:spMkLst>
-        </pc:spChg>
       </pc:sldChg>
       <pc:sldChg chg="modSp mod">
         <pc:chgData name="Javier Bas Vicente" userId="96bf8a96-3310-496c-8c7e-8a087f977faa" providerId="ADAL" clId="{8E23F97C-4D0E-4F0C-8EBD-648EBDCF4A56}" dt="2024-10-31T08:40:45.767" v="1" actId="20577"/>
@@ -175,14 +167,6 @@
           <pc:docMk/>
           <pc:sldMk cId="2149080833" sldId="278"/>
         </pc:sldMkLst>
-        <pc:spChg chg="mod">
-          <ac:chgData name="Javier Bas Vicente" userId="96bf8a96-3310-496c-8c7e-8a087f977faa" providerId="ADAL" clId="{8E23F97C-4D0E-4F0C-8EBD-648EBDCF4A56}" dt="2024-10-31T08:40:45.767" v="1" actId="20577"/>
-          <ac:spMkLst>
-            <pc:docMk/>
-            <pc:sldMk cId="2149080833" sldId="278"/>
-            <ac:spMk id="3" creationId="{6866AA87-E000-52D2-F65D-4B414B00BBE5}"/>
-          </ac:spMkLst>
-        </pc:spChg>
       </pc:sldChg>
       <pc:sldChg chg="modSp mod">
         <pc:chgData name="Javier Bas Vicente" userId="96bf8a96-3310-496c-8c7e-8a087f977faa" providerId="ADAL" clId="{8E23F97C-4D0E-4F0C-8EBD-648EBDCF4A56}" dt="2024-10-31T08:44:05.733" v="13" actId="20577"/>
@@ -190,14 +174,6 @@
           <pc:docMk/>
           <pc:sldMk cId="564201163" sldId="280"/>
         </pc:sldMkLst>
-        <pc:spChg chg="mod">
-          <ac:chgData name="Javier Bas Vicente" userId="96bf8a96-3310-496c-8c7e-8a087f977faa" providerId="ADAL" clId="{8E23F97C-4D0E-4F0C-8EBD-648EBDCF4A56}" dt="2024-10-31T08:44:05.733" v="13" actId="20577"/>
-          <ac:spMkLst>
-            <pc:docMk/>
-            <pc:sldMk cId="564201163" sldId="280"/>
-            <ac:spMk id="3" creationId="{068F0C39-44FF-99B2-7103-C6D38F774B5B}"/>
-          </ac:spMkLst>
-        </pc:spChg>
       </pc:sldChg>
       <pc:sldChg chg="modSp mod">
         <pc:chgData name="Javier Bas Vicente" userId="96bf8a96-3310-496c-8c7e-8a087f977faa" providerId="ADAL" clId="{8E23F97C-4D0E-4F0C-8EBD-648EBDCF4A56}" dt="2024-11-04T09:07:06.494" v="36" actId="20577"/>
@@ -205,22 +181,6 @@
           <pc:docMk/>
           <pc:sldMk cId="2379344142" sldId="281"/>
         </pc:sldMkLst>
-        <pc:spChg chg="mod">
-          <ac:chgData name="Javier Bas Vicente" userId="96bf8a96-3310-496c-8c7e-8a087f977faa" providerId="ADAL" clId="{8E23F97C-4D0E-4F0C-8EBD-648EBDCF4A56}" dt="2024-11-04T09:07:06.494" v="36" actId="20577"/>
-          <ac:spMkLst>
-            <pc:docMk/>
-            <pc:sldMk cId="2379344142" sldId="281"/>
-            <ac:spMk id="8" creationId="{69DD4287-53C5-725E-A0F3-3DBCC9B8DD63}"/>
-          </ac:spMkLst>
-        </pc:spChg>
-        <pc:graphicFrameChg chg="modGraphic">
-          <ac:chgData name="Javier Bas Vicente" userId="96bf8a96-3310-496c-8c7e-8a087f977faa" providerId="ADAL" clId="{8E23F97C-4D0E-4F0C-8EBD-648EBDCF4A56}" dt="2024-10-31T08:45:21.914" v="16" actId="20577"/>
-          <ac:graphicFrameMkLst>
-            <pc:docMk/>
-            <pc:sldMk cId="2379344142" sldId="281"/>
-            <ac:graphicFrameMk id="7" creationId="{0A3DED7B-E232-3C9E-B362-32B2434FF548}"/>
-          </ac:graphicFrameMkLst>
-        </pc:graphicFrameChg>
       </pc:sldChg>
       <pc:sldChg chg="modSp mod">
         <pc:chgData name="Javier Bas Vicente" userId="96bf8a96-3310-496c-8c7e-8a087f977faa" providerId="ADAL" clId="{8E23F97C-4D0E-4F0C-8EBD-648EBDCF4A56}" dt="2024-11-04T09:17:46.163" v="37" actId="115"/>
@@ -228,14 +188,6 @@
           <pc:docMk/>
           <pc:sldMk cId="2946059860" sldId="288"/>
         </pc:sldMkLst>
-        <pc:spChg chg="mod">
-          <ac:chgData name="Javier Bas Vicente" userId="96bf8a96-3310-496c-8c7e-8a087f977faa" providerId="ADAL" clId="{8E23F97C-4D0E-4F0C-8EBD-648EBDCF4A56}" dt="2024-11-04T09:17:46.163" v="37" actId="115"/>
-          <ac:spMkLst>
-            <pc:docMk/>
-            <pc:sldMk cId="2946059860" sldId="288"/>
-            <ac:spMk id="7" creationId="{22B2EC76-678F-F957-F964-E20A68DD6FF9}"/>
-          </ac:spMkLst>
-        </pc:spChg>
       </pc:sldChg>
       <pc:sldChg chg="modSp mod">
         <pc:chgData name="Javier Bas Vicente" userId="96bf8a96-3310-496c-8c7e-8a087f977faa" providerId="ADAL" clId="{8E23F97C-4D0E-4F0C-8EBD-648EBDCF4A56}" dt="2024-11-04T09:18:04.968" v="38" actId="6549"/>
@@ -243,14 +195,6 @@
           <pc:docMk/>
           <pc:sldMk cId="3244398427" sldId="289"/>
         </pc:sldMkLst>
-        <pc:spChg chg="mod">
-          <ac:chgData name="Javier Bas Vicente" userId="96bf8a96-3310-496c-8c7e-8a087f977faa" providerId="ADAL" clId="{8E23F97C-4D0E-4F0C-8EBD-648EBDCF4A56}" dt="2024-11-04T09:18:04.968" v="38" actId="6549"/>
-          <ac:spMkLst>
-            <pc:docMk/>
-            <pc:sldMk cId="3244398427" sldId="289"/>
-            <ac:spMk id="3" creationId="{F7EF27C5-01B7-9F60-ECDA-A1F376586FC5}"/>
-          </ac:spMkLst>
-        </pc:spChg>
       </pc:sldChg>
       <pc:sldChg chg="modSp mod">
         <pc:chgData name="Javier Bas Vicente" userId="96bf8a96-3310-496c-8c7e-8a087f977faa" providerId="ADAL" clId="{8E23F97C-4D0E-4F0C-8EBD-648EBDCF4A56}" dt="2024-11-04T09:25:04.130" v="39" actId="115"/>
@@ -258,14 +202,6 @@
           <pc:docMk/>
           <pc:sldMk cId="4096357962" sldId="292"/>
         </pc:sldMkLst>
-        <pc:spChg chg="mod">
-          <ac:chgData name="Javier Bas Vicente" userId="96bf8a96-3310-496c-8c7e-8a087f977faa" providerId="ADAL" clId="{8E23F97C-4D0E-4F0C-8EBD-648EBDCF4A56}" dt="2024-11-04T09:25:04.130" v="39" actId="115"/>
-          <ac:spMkLst>
-            <pc:docMk/>
-            <pc:sldMk cId="4096357962" sldId="292"/>
-            <ac:spMk id="14" creationId="{3CABD2D2-DC94-43FD-1935-6B44B4CDBCFA}"/>
-          </ac:spMkLst>
-        </pc:spChg>
       </pc:sldChg>
     </pc:docChg>
   </pc:docChgLst>
@@ -282,14 +218,6 @@
           <pc:docMk/>
           <pc:sldMk cId="3761768786" sldId="258"/>
         </pc:sldMkLst>
-        <pc:spChg chg="mod">
-          <ac:chgData name="Javier Bas Vicente" userId="96bf8a96-3310-496c-8c7e-8a087f977faa" providerId="ADAL" clId="{3C9ABCAB-493E-4D17-839E-F2056CFBE8FD}" dt="2023-10-30T15:41:20.178" v="31" actId="6549"/>
-          <ac:spMkLst>
-            <pc:docMk/>
-            <pc:sldMk cId="3761768786" sldId="258"/>
-            <ac:spMk id="3" creationId="{068F0C39-44FF-99B2-7103-C6D38F774B5B}"/>
-          </ac:spMkLst>
-        </pc:spChg>
       </pc:sldChg>
       <pc:sldChg chg="delSp modSp mod">
         <pc:chgData name="Javier Bas Vicente" userId="96bf8a96-3310-496c-8c7e-8a087f977faa" providerId="ADAL" clId="{3C9ABCAB-493E-4D17-839E-F2056CFBE8FD}" dt="2023-10-31T14:49:06.203" v="715" actId="27636"/>
@@ -297,22 +225,6 @@
           <pc:docMk/>
           <pc:sldMk cId="3676436470" sldId="279"/>
         </pc:sldMkLst>
-        <pc:spChg chg="del mod">
-          <ac:chgData name="Javier Bas Vicente" userId="96bf8a96-3310-496c-8c7e-8a087f977faa" providerId="ADAL" clId="{3C9ABCAB-493E-4D17-839E-F2056CFBE8FD}" dt="2023-10-31T14:49:02.745" v="713" actId="478"/>
-          <ac:spMkLst>
-            <pc:docMk/>
-            <pc:sldMk cId="3676436470" sldId="279"/>
-            <ac:spMk id="5" creationId="{FD38933F-31C8-2AB5-6517-D9F2A467F431}"/>
-          </ac:spMkLst>
-        </pc:spChg>
-        <pc:spChg chg="mod">
-          <ac:chgData name="Javier Bas Vicente" userId="96bf8a96-3310-496c-8c7e-8a087f977faa" providerId="ADAL" clId="{3C9ABCAB-493E-4D17-839E-F2056CFBE8FD}" dt="2023-10-31T14:49:06.203" v="715" actId="27636"/>
-          <ac:spMkLst>
-            <pc:docMk/>
-            <pc:sldMk cId="3676436470" sldId="279"/>
-            <ac:spMk id="152" creationId="{B7719AE7-5D76-3CA6-C03E-F772C1896EF4}"/>
-          </ac:spMkLst>
-        </pc:spChg>
       </pc:sldChg>
       <pc:sldChg chg="modSp mod">
         <pc:chgData name="Javier Bas Vicente" userId="96bf8a96-3310-496c-8c7e-8a087f977faa" providerId="ADAL" clId="{3C9ABCAB-493E-4D17-839E-F2056CFBE8FD}" dt="2023-10-30T15:42:12.502" v="56" actId="20577"/>
@@ -320,14 +232,6 @@
           <pc:docMk/>
           <pc:sldMk cId="564201163" sldId="280"/>
         </pc:sldMkLst>
-        <pc:spChg chg="mod">
-          <ac:chgData name="Javier Bas Vicente" userId="96bf8a96-3310-496c-8c7e-8a087f977faa" providerId="ADAL" clId="{3C9ABCAB-493E-4D17-839E-F2056CFBE8FD}" dt="2023-10-30T15:42:12.502" v="56" actId="20577"/>
-          <ac:spMkLst>
-            <pc:docMk/>
-            <pc:sldMk cId="564201163" sldId="280"/>
-            <ac:spMk id="3" creationId="{068F0C39-44FF-99B2-7103-C6D38F774B5B}"/>
-          </ac:spMkLst>
-        </pc:spChg>
       </pc:sldChg>
       <pc:sldChg chg="modSp mod">
         <pc:chgData name="Javier Bas Vicente" userId="96bf8a96-3310-496c-8c7e-8a087f977faa" providerId="ADAL" clId="{3C9ABCAB-493E-4D17-839E-F2056CFBE8FD}" dt="2023-10-30T15:53:17.943" v="65" actId="20577"/>
@@ -335,14 +239,6 @@
           <pc:docMk/>
           <pc:sldMk cId="2379344142" sldId="281"/>
         </pc:sldMkLst>
-        <pc:spChg chg="mod">
-          <ac:chgData name="Javier Bas Vicente" userId="96bf8a96-3310-496c-8c7e-8a087f977faa" providerId="ADAL" clId="{3C9ABCAB-493E-4D17-839E-F2056CFBE8FD}" dt="2023-10-30T15:53:17.943" v="65" actId="20577"/>
-          <ac:spMkLst>
-            <pc:docMk/>
-            <pc:sldMk cId="2379344142" sldId="281"/>
-            <ac:spMk id="3" creationId="{F7EF27C5-01B7-9F60-ECDA-A1F376586FC5}"/>
-          </ac:spMkLst>
-        </pc:spChg>
       </pc:sldChg>
       <pc:sldChg chg="del">
         <pc:chgData name="Javier Bas Vicente" userId="96bf8a96-3310-496c-8c7e-8a087f977faa" providerId="ADAL" clId="{3C9ABCAB-493E-4D17-839E-F2056CFBE8FD}" dt="2023-10-30T16:59:16.443" v="673" actId="47"/>
@@ -357,14 +253,6 @@
           <pc:docMk/>
           <pc:sldMk cId="713773263" sldId="284"/>
         </pc:sldMkLst>
-        <pc:spChg chg="mod">
-          <ac:chgData name="Javier Bas Vicente" userId="96bf8a96-3310-496c-8c7e-8a087f977faa" providerId="ADAL" clId="{3C9ABCAB-493E-4D17-839E-F2056CFBE8FD}" dt="2023-10-30T16:55:25.691" v="672" actId="20577"/>
-          <ac:spMkLst>
-            <pc:docMk/>
-            <pc:sldMk cId="713773263" sldId="284"/>
-            <ac:spMk id="3" creationId="{F7EF27C5-01B7-9F60-ECDA-A1F376586FC5}"/>
-          </ac:spMkLst>
-        </pc:spChg>
       </pc:sldChg>
       <pc:sldChg chg="modSp mod">
         <pc:chgData name="Javier Bas Vicente" userId="96bf8a96-3310-496c-8c7e-8a087f977faa" providerId="ADAL" clId="{3C9ABCAB-493E-4D17-839E-F2056CFBE8FD}" dt="2023-10-30T15:56:52.525" v="67" actId="6549"/>
@@ -372,14 +260,6 @@
           <pc:docMk/>
           <pc:sldMk cId="1275591341" sldId="286"/>
         </pc:sldMkLst>
-        <pc:spChg chg="mod">
-          <ac:chgData name="Javier Bas Vicente" userId="96bf8a96-3310-496c-8c7e-8a087f977faa" providerId="ADAL" clId="{3C9ABCAB-493E-4D17-839E-F2056CFBE8FD}" dt="2023-10-30T15:56:52.525" v="67" actId="6549"/>
-          <ac:spMkLst>
-            <pc:docMk/>
-            <pc:sldMk cId="1275591341" sldId="286"/>
-            <ac:spMk id="3" creationId="{F7EF27C5-01B7-9F60-ECDA-A1F376586FC5}"/>
-          </ac:spMkLst>
-        </pc:spChg>
       </pc:sldChg>
       <pc:sldChg chg="modSp del mod">
         <pc:chgData name="Javier Bas Vicente" userId="96bf8a96-3310-496c-8c7e-8a087f977faa" providerId="ADAL" clId="{3C9ABCAB-493E-4D17-839E-F2056CFBE8FD}" dt="2023-10-30T16:59:18.601" v="674" actId="47"/>
@@ -387,22 +267,6 @@
           <pc:docMk/>
           <pc:sldMk cId="2000089067" sldId="287"/>
         </pc:sldMkLst>
-        <pc:spChg chg="mod">
-          <ac:chgData name="Javier Bas Vicente" userId="96bf8a96-3310-496c-8c7e-8a087f977faa" providerId="ADAL" clId="{3C9ABCAB-493E-4D17-839E-F2056CFBE8FD}" dt="2023-10-30T16:54:41.718" v="668" actId="20577"/>
-          <ac:spMkLst>
-            <pc:docMk/>
-            <pc:sldMk cId="2000089067" sldId="287"/>
-            <ac:spMk id="3" creationId="{F7EF27C5-01B7-9F60-ECDA-A1F376586FC5}"/>
-          </ac:spMkLst>
-        </pc:spChg>
-        <pc:spChg chg="mod">
-          <ac:chgData name="Javier Bas Vicente" userId="96bf8a96-3310-496c-8c7e-8a087f977faa" providerId="ADAL" clId="{3C9ABCAB-493E-4D17-839E-F2056CFBE8FD}" dt="2023-10-30T16:54:50.698" v="669" actId="6549"/>
-          <ac:spMkLst>
-            <pc:docMk/>
-            <pc:sldMk cId="2000089067" sldId="287"/>
-            <ac:spMk id="7" creationId="{84FF8E63-E2AF-7BCA-C7BA-B28A8BD0A0C0}"/>
-          </ac:spMkLst>
-        </pc:spChg>
       </pc:sldChg>
       <pc:sldChg chg="addSp delSp modSp mod">
         <pc:chgData name="Javier Bas Vicente" userId="96bf8a96-3310-496c-8c7e-8a087f977faa" providerId="ADAL" clId="{3C9ABCAB-493E-4D17-839E-F2056CFBE8FD}" dt="2023-10-31T15:26:46.150" v="1290" actId="20577"/>
@@ -410,110 +274,6 @@
           <pc:docMk/>
           <pc:sldMk cId="2946059860" sldId="288"/>
         </pc:sldMkLst>
-        <pc:spChg chg="mod">
-          <ac:chgData name="Javier Bas Vicente" userId="96bf8a96-3310-496c-8c7e-8a087f977faa" providerId="ADAL" clId="{3C9ABCAB-493E-4D17-839E-F2056CFBE8FD}" dt="2023-10-31T15:26:46.150" v="1290" actId="20577"/>
-          <ac:spMkLst>
-            <pc:docMk/>
-            <pc:sldMk cId="2946059860" sldId="288"/>
-            <ac:spMk id="3" creationId="{F7EF27C5-01B7-9F60-ECDA-A1F376586FC5}"/>
-          </ac:spMkLst>
-        </pc:spChg>
-        <pc:spChg chg="add mod">
-          <ac:chgData name="Javier Bas Vicente" userId="96bf8a96-3310-496c-8c7e-8a087f977faa" providerId="ADAL" clId="{3C9ABCAB-493E-4D17-839E-F2056CFBE8FD}" dt="2023-10-31T15:26:34.534" v="1281" actId="20577"/>
-          <ac:spMkLst>
-            <pc:docMk/>
-            <pc:sldMk cId="2946059860" sldId="288"/>
-            <ac:spMk id="7" creationId="{22B2EC76-678F-F957-F964-E20A68DD6FF9}"/>
-          </ac:spMkLst>
-        </pc:spChg>
-        <pc:spChg chg="del mod">
-          <ac:chgData name="Javier Bas Vicente" userId="96bf8a96-3310-496c-8c7e-8a087f977faa" providerId="ADAL" clId="{3C9ABCAB-493E-4D17-839E-F2056CFBE8FD}" dt="2023-10-31T15:25:41.386" v="1144" actId="478"/>
-          <ac:spMkLst>
-            <pc:docMk/>
-            <pc:sldMk cId="2946059860" sldId="288"/>
-            <ac:spMk id="12" creationId="{B4DA19C9-C5DC-5E6E-F21C-D9FC76E063EE}"/>
-          </ac:spMkLst>
-        </pc:spChg>
-        <pc:spChg chg="mod">
-          <ac:chgData name="Javier Bas Vicente" userId="96bf8a96-3310-496c-8c7e-8a087f977faa" providerId="ADAL" clId="{3C9ABCAB-493E-4D17-839E-F2056CFBE8FD}" dt="2023-10-31T15:25:55.588" v="1226" actId="14100"/>
-          <ac:spMkLst>
-            <pc:docMk/>
-            <pc:sldMk cId="2946059860" sldId="288"/>
-            <ac:spMk id="13" creationId="{3567DF27-2684-0050-C0DD-AAF72EAA15D8}"/>
-          </ac:spMkLst>
-        </pc:spChg>
-        <pc:spChg chg="del">
-          <ac:chgData name="Javier Bas Vicente" userId="96bf8a96-3310-496c-8c7e-8a087f977faa" providerId="ADAL" clId="{3C9ABCAB-493E-4D17-839E-F2056CFBE8FD}" dt="2023-10-30T16:46:53.122" v="77" actId="478"/>
-          <ac:spMkLst>
-            <pc:docMk/>
-            <pc:sldMk cId="2946059860" sldId="288"/>
-            <ac:spMk id="15" creationId="{B9E1F2FF-9D12-49E7-8ED5-D57A1329526B}"/>
-          </ac:spMkLst>
-        </pc:spChg>
-        <pc:spChg chg="del mod">
-          <ac:chgData name="Javier Bas Vicente" userId="96bf8a96-3310-496c-8c7e-8a087f977faa" providerId="ADAL" clId="{3C9ABCAB-493E-4D17-839E-F2056CFBE8FD}" dt="2023-10-31T15:25:41.386" v="1144" actId="478"/>
-          <ac:spMkLst>
-            <pc:docMk/>
-            <pc:sldMk cId="2946059860" sldId="288"/>
-            <ac:spMk id="16" creationId="{167984DF-5D1C-E385-D180-E5B1AD8867FB}"/>
-          </ac:spMkLst>
-        </pc:spChg>
-        <pc:spChg chg="del mod">
-          <ac:chgData name="Javier Bas Vicente" userId="96bf8a96-3310-496c-8c7e-8a087f977faa" providerId="ADAL" clId="{3C9ABCAB-493E-4D17-839E-F2056CFBE8FD}" dt="2023-10-31T15:25:41.386" v="1144" actId="478"/>
-          <ac:spMkLst>
-            <pc:docMk/>
-            <pc:sldMk cId="2946059860" sldId="288"/>
-            <ac:spMk id="20" creationId="{77723D12-E298-5276-D69B-3E8C18F03501}"/>
-          </ac:spMkLst>
-        </pc:spChg>
-        <pc:spChg chg="del mod">
-          <ac:chgData name="Javier Bas Vicente" userId="96bf8a96-3310-496c-8c7e-8a087f977faa" providerId="ADAL" clId="{3C9ABCAB-493E-4D17-839E-F2056CFBE8FD}" dt="2023-10-31T15:25:41.386" v="1144" actId="478"/>
-          <ac:spMkLst>
-            <pc:docMk/>
-            <pc:sldMk cId="2946059860" sldId="288"/>
-            <ac:spMk id="21" creationId="{E810AA24-FBC5-9ECC-6E41-A52F7C872F31}"/>
-          </ac:spMkLst>
-        </pc:spChg>
-        <pc:spChg chg="del mod">
-          <ac:chgData name="Javier Bas Vicente" userId="96bf8a96-3310-496c-8c7e-8a087f977faa" providerId="ADAL" clId="{3C9ABCAB-493E-4D17-839E-F2056CFBE8FD}" dt="2023-10-31T15:25:41.386" v="1144" actId="478"/>
-          <ac:spMkLst>
-            <pc:docMk/>
-            <pc:sldMk cId="2946059860" sldId="288"/>
-            <ac:spMk id="22" creationId="{E6B287B8-B69F-6039-592D-0C990309A52C}"/>
-          </ac:spMkLst>
-        </pc:spChg>
-        <pc:spChg chg="del">
-          <ac:chgData name="Javier Bas Vicente" userId="96bf8a96-3310-496c-8c7e-8a087f977faa" providerId="ADAL" clId="{3C9ABCAB-493E-4D17-839E-F2056CFBE8FD}" dt="2023-10-31T15:25:41.386" v="1144" actId="478"/>
-          <ac:spMkLst>
-            <pc:docMk/>
-            <pc:sldMk cId="2946059860" sldId="288"/>
-            <ac:spMk id="23" creationId="{99E02092-4B79-9314-EFE8-F5077AB66630}"/>
-          </ac:spMkLst>
-        </pc:spChg>
-        <pc:picChg chg="del mod">
-          <ac:chgData name="Javier Bas Vicente" userId="96bf8a96-3310-496c-8c7e-8a087f977faa" providerId="ADAL" clId="{3C9ABCAB-493E-4D17-839E-F2056CFBE8FD}" dt="2023-10-31T15:25:41.386" v="1144" actId="478"/>
-          <ac:picMkLst>
-            <pc:docMk/>
-            <pc:sldMk cId="2946059860" sldId="288"/>
-            <ac:picMk id="8" creationId="{1DA296CE-107F-EBC7-F9F9-596CE8402C39}"/>
-          </ac:picMkLst>
-        </pc:picChg>
-        <pc:picChg chg="mod">
-          <ac:chgData name="Javier Bas Vicente" userId="96bf8a96-3310-496c-8c7e-8a087f977faa" providerId="ADAL" clId="{3C9ABCAB-493E-4D17-839E-F2056CFBE8FD}" dt="2023-10-31T15:25:55.588" v="1226" actId="14100"/>
-          <ac:picMkLst>
-            <pc:docMk/>
-            <pc:sldMk cId="2946059860" sldId="288"/>
-            <ac:picMk id="11" creationId="{D6474E9B-2814-21BD-E486-F59921F3FDF6}"/>
-          </ac:picMkLst>
-        </pc:picChg>
-        <pc:cxnChg chg="del mod">
-          <ac:chgData name="Javier Bas Vicente" userId="96bf8a96-3310-496c-8c7e-8a087f977faa" providerId="ADAL" clId="{3C9ABCAB-493E-4D17-839E-F2056CFBE8FD}" dt="2023-10-31T15:25:41.386" v="1144" actId="478"/>
-          <ac:cxnSpMkLst>
-            <pc:docMk/>
-            <pc:sldMk cId="2946059860" sldId="288"/>
-            <ac:cxnSpMk id="14" creationId="{22E80EF3-D563-F8AB-4632-9DA2DEC0C1A8}"/>
-          </ac:cxnSpMkLst>
-        </pc:cxnChg>
       </pc:sldChg>
       <pc:sldChg chg="addSp delSp modSp mod">
         <pc:chgData name="Javier Bas Vicente" userId="96bf8a96-3310-496c-8c7e-8a087f977faa" providerId="ADAL" clId="{3C9ABCAB-493E-4D17-839E-F2056CFBE8FD}" dt="2023-10-31T15:43:12.751" v="1291" actId="6549"/>
@@ -521,22 +281,6 @@
           <pc:docMk/>
           <pc:sldMk cId="1434330880" sldId="290"/>
         </pc:sldMkLst>
-        <pc:spChg chg="mod">
-          <ac:chgData name="Javier Bas Vicente" userId="96bf8a96-3310-496c-8c7e-8a087f977faa" providerId="ADAL" clId="{3C9ABCAB-493E-4D17-839E-F2056CFBE8FD}" dt="2023-10-31T15:43:12.751" v="1291" actId="6549"/>
-          <ac:spMkLst>
-            <pc:docMk/>
-            <pc:sldMk cId="1434330880" sldId="290"/>
-            <ac:spMk id="3" creationId="{F7EF27C5-01B7-9F60-ECDA-A1F376586FC5}"/>
-          </ac:spMkLst>
-        </pc:spChg>
-        <pc:spChg chg="add del mod">
-          <ac:chgData name="Javier Bas Vicente" userId="96bf8a96-3310-496c-8c7e-8a087f977faa" providerId="ADAL" clId="{3C9ABCAB-493E-4D17-839E-F2056CFBE8FD}" dt="2023-10-30T17:03:53.962" v="710" actId="1038"/>
-          <ac:spMkLst>
-            <pc:docMk/>
-            <pc:sldMk cId="1434330880" sldId="290"/>
-            <ac:spMk id="7" creationId="{61259946-3012-9066-31E4-C63BA9D94F28}"/>
-          </ac:spMkLst>
-        </pc:spChg>
       </pc:sldChg>
       <pc:sldChg chg="addSp modSp mod">
         <pc:chgData name="Javier Bas Vicente" userId="96bf8a96-3310-496c-8c7e-8a087f977faa" providerId="ADAL" clId="{3C9ABCAB-493E-4D17-839E-F2056CFBE8FD}" dt="2023-10-31T15:52:28.741" v="1505" actId="1037"/>
@@ -544,54 +288,6 @@
           <pc:docMk/>
           <pc:sldMk cId="4096357962" sldId="292"/>
         </pc:sldMkLst>
-        <pc:spChg chg="add mod">
-          <ac:chgData name="Javier Bas Vicente" userId="96bf8a96-3310-496c-8c7e-8a087f977faa" providerId="ADAL" clId="{3C9ABCAB-493E-4D17-839E-F2056CFBE8FD}" dt="2023-10-31T15:52:28.741" v="1505" actId="1037"/>
-          <ac:spMkLst>
-            <pc:docMk/>
-            <pc:sldMk cId="4096357962" sldId="292"/>
-            <ac:spMk id="3" creationId="{BA89FC74-4CB6-28FE-7039-F264C47F2E4C}"/>
-          </ac:spMkLst>
-        </pc:spChg>
-        <pc:spChg chg="mod">
-          <ac:chgData name="Javier Bas Vicente" userId="96bf8a96-3310-496c-8c7e-8a087f977faa" providerId="ADAL" clId="{3C9ABCAB-493E-4D17-839E-F2056CFBE8FD}" dt="2023-10-31T15:48:11.837" v="1356" actId="20577"/>
-          <ac:spMkLst>
-            <pc:docMk/>
-            <pc:sldMk cId="4096357962" sldId="292"/>
-            <ac:spMk id="7" creationId="{9EAA3807-656A-ABEE-0950-BF49490A30B0}"/>
-          </ac:spMkLst>
-        </pc:spChg>
-        <pc:picChg chg="mod">
-          <ac:chgData name="Javier Bas Vicente" userId="96bf8a96-3310-496c-8c7e-8a087f977faa" providerId="ADAL" clId="{3C9ABCAB-493E-4D17-839E-F2056CFBE8FD}" dt="2023-10-31T15:48:27.838" v="1386" actId="1036"/>
-          <ac:picMkLst>
-            <pc:docMk/>
-            <pc:sldMk cId="4096357962" sldId="292"/>
-            <ac:picMk id="9" creationId="{5B5D2FB5-8036-59E2-FE4D-3ACE146026D5}"/>
-          </ac:picMkLst>
-        </pc:picChg>
-        <pc:picChg chg="mod">
-          <ac:chgData name="Javier Bas Vicente" userId="96bf8a96-3310-496c-8c7e-8a087f977faa" providerId="ADAL" clId="{3C9ABCAB-493E-4D17-839E-F2056CFBE8FD}" dt="2023-10-31T15:48:27.838" v="1386" actId="1036"/>
-          <ac:picMkLst>
-            <pc:docMk/>
-            <pc:sldMk cId="4096357962" sldId="292"/>
-            <ac:picMk id="13" creationId="{A9FBD28C-076D-CA6E-FB74-FEBAF67E716A}"/>
-          </ac:picMkLst>
-        </pc:picChg>
-        <pc:cxnChg chg="mod">
-          <ac:chgData name="Javier Bas Vicente" userId="96bf8a96-3310-496c-8c7e-8a087f977faa" providerId="ADAL" clId="{3C9ABCAB-493E-4D17-839E-F2056CFBE8FD}" dt="2023-10-31T15:48:27.838" v="1386" actId="1036"/>
-          <ac:cxnSpMkLst>
-            <pc:docMk/>
-            <pc:sldMk cId="4096357962" sldId="292"/>
-            <ac:cxnSpMk id="10" creationId="{501CFA49-B6F6-2F5A-D627-7DC74BB1676B}"/>
-          </ac:cxnSpMkLst>
-        </pc:cxnChg>
-        <pc:cxnChg chg="mod">
-          <ac:chgData name="Javier Bas Vicente" userId="96bf8a96-3310-496c-8c7e-8a087f977faa" providerId="ADAL" clId="{3C9ABCAB-493E-4D17-839E-F2056CFBE8FD}" dt="2023-10-31T15:48:27.838" v="1386" actId="1036"/>
-          <ac:cxnSpMkLst>
-            <pc:docMk/>
-            <pc:sldMk cId="4096357962" sldId="292"/>
-            <ac:cxnSpMk id="12" creationId="{5D618F56-9772-CF65-F17E-DC63DAFF5AED}"/>
-          </ac:cxnSpMkLst>
-        </pc:cxnChg>
       </pc:sldChg>
       <pc:sldChg chg="modSp mod">
         <pc:chgData name="Javier Bas Vicente" userId="96bf8a96-3310-496c-8c7e-8a087f977faa" providerId="ADAL" clId="{3C9ABCAB-493E-4D17-839E-F2056CFBE8FD}" dt="2023-10-31T15:57:08.917" v="1609" actId="20577"/>
@@ -599,14 +295,6 @@
           <pc:docMk/>
           <pc:sldMk cId="276195200" sldId="294"/>
         </pc:sldMkLst>
-        <pc:spChg chg="mod">
-          <ac:chgData name="Javier Bas Vicente" userId="96bf8a96-3310-496c-8c7e-8a087f977faa" providerId="ADAL" clId="{3C9ABCAB-493E-4D17-839E-F2056CFBE8FD}" dt="2023-10-31T15:57:08.917" v="1609" actId="20577"/>
-          <ac:spMkLst>
-            <pc:docMk/>
-            <pc:sldMk cId="276195200" sldId="294"/>
-            <ac:spMk id="3" creationId="{F7EF27C5-01B7-9F60-ECDA-A1F376586FC5}"/>
-          </ac:spMkLst>
-        </pc:spChg>
       </pc:sldChg>
       <pc:sldChg chg="modSp mod">
         <pc:chgData name="Javier Bas Vicente" userId="96bf8a96-3310-496c-8c7e-8a087f977faa" providerId="ADAL" clId="{3C9ABCAB-493E-4D17-839E-F2056CFBE8FD}" dt="2023-10-31T17:11:20.178" v="1756" actId="1037"/>
@@ -614,30 +302,6 @@
           <pc:docMk/>
           <pc:sldMk cId="2985155455" sldId="295"/>
         </pc:sldMkLst>
-        <pc:spChg chg="mod">
-          <ac:chgData name="Javier Bas Vicente" userId="96bf8a96-3310-496c-8c7e-8a087f977faa" providerId="ADAL" clId="{3C9ABCAB-493E-4D17-839E-F2056CFBE8FD}" dt="2023-10-31T17:06:28.835" v="1610" actId="20577"/>
-          <ac:spMkLst>
-            <pc:docMk/>
-            <pc:sldMk cId="2985155455" sldId="295"/>
-            <ac:spMk id="3" creationId="{F7EF27C5-01B7-9F60-ECDA-A1F376586FC5}"/>
-          </ac:spMkLst>
-        </pc:spChg>
-        <pc:spChg chg="mod">
-          <ac:chgData name="Javier Bas Vicente" userId="96bf8a96-3310-496c-8c7e-8a087f977faa" providerId="ADAL" clId="{3C9ABCAB-493E-4D17-839E-F2056CFBE8FD}" dt="2023-10-31T17:11:02.059" v="1709" actId="20577"/>
-          <ac:spMkLst>
-            <pc:docMk/>
-            <pc:sldMk cId="2985155455" sldId="295"/>
-            <ac:spMk id="14" creationId="{12731CC3-D1E2-9E0F-9DE8-FB53F20144D7}"/>
-          </ac:spMkLst>
-        </pc:spChg>
-        <pc:spChg chg="mod">
-          <ac:chgData name="Javier Bas Vicente" userId="96bf8a96-3310-496c-8c7e-8a087f977faa" providerId="ADAL" clId="{3C9ABCAB-493E-4D17-839E-F2056CFBE8FD}" dt="2023-10-31T17:11:20.178" v="1756" actId="1037"/>
-          <ac:spMkLst>
-            <pc:docMk/>
-            <pc:sldMk cId="2985155455" sldId="295"/>
-            <ac:spMk id="15" creationId="{CDA52ACE-3DE3-D61B-2E14-9D8A97E840A1}"/>
-          </ac:spMkLst>
-        </pc:spChg>
       </pc:sldChg>
       <pc:sldChg chg="modSp">
         <pc:chgData name="Javier Bas Vicente" userId="96bf8a96-3310-496c-8c7e-8a087f977faa" providerId="ADAL" clId="{3C9ABCAB-493E-4D17-839E-F2056CFBE8FD}" dt="2023-10-31T17:10:57.961" v="1701" actId="20577"/>
@@ -645,14 +309,6 @@
           <pc:docMk/>
           <pc:sldMk cId="418663697" sldId="296"/>
         </pc:sldMkLst>
-        <pc:spChg chg="mod">
-          <ac:chgData name="Javier Bas Vicente" userId="96bf8a96-3310-496c-8c7e-8a087f977faa" providerId="ADAL" clId="{3C9ABCAB-493E-4D17-839E-F2056CFBE8FD}" dt="2023-10-31T17:10:57.961" v="1701" actId="20577"/>
-          <ac:spMkLst>
-            <pc:docMk/>
-            <pc:sldMk cId="418663697" sldId="296"/>
-            <ac:spMk id="3" creationId="{F7EF27C5-01B7-9F60-ECDA-A1F376586FC5}"/>
-          </ac:spMkLst>
-        </pc:spChg>
       </pc:sldChg>
       <pc:sldChg chg="modSp mod">
         <pc:chgData name="Javier Bas Vicente" userId="96bf8a96-3310-496c-8c7e-8a087f977faa" providerId="ADAL" clId="{3C9ABCAB-493E-4D17-839E-F2056CFBE8FD}" dt="2023-10-31T17:18:08.146" v="1762" actId="20577"/>
@@ -660,14 +316,6 @@
           <pc:docMk/>
           <pc:sldMk cId="4119110571" sldId="299"/>
         </pc:sldMkLst>
-        <pc:spChg chg="mod">
-          <ac:chgData name="Javier Bas Vicente" userId="96bf8a96-3310-496c-8c7e-8a087f977faa" providerId="ADAL" clId="{3C9ABCAB-493E-4D17-839E-F2056CFBE8FD}" dt="2023-10-31T17:18:08.146" v="1762" actId="20577"/>
-          <ac:spMkLst>
-            <pc:docMk/>
-            <pc:sldMk cId="4119110571" sldId="299"/>
-            <ac:spMk id="3" creationId="{F7EF27C5-01B7-9F60-ECDA-A1F376586FC5}"/>
-          </ac:spMkLst>
-        </pc:spChg>
       </pc:sldChg>
       <pc:sldChg chg="delSp modSp add mod ord">
         <pc:chgData name="Javier Bas Vicente" userId="96bf8a96-3310-496c-8c7e-8a087f977faa" providerId="ADAL" clId="{3C9ABCAB-493E-4D17-839E-F2056CFBE8FD}" dt="2023-10-31T15:25:36.421" v="1143" actId="1036"/>
@@ -675,102 +323,60 @@
           <pc:docMk/>
           <pc:sldMk cId="59019250" sldId="300"/>
         </pc:sldMkLst>
+      </pc:sldChg>
+    </pc:docChg>
+  </pc:docChgLst>
+  <pc:docChgLst>
+    <pc:chgData name="Javier Bas Vicente" userId="96bf8a96-3310-496c-8c7e-8a087f977faa" providerId="ADAL" clId="{01F37B28-FECE-485C-BA1B-E2D29CFD8DE6}"/>
+    <pc:docChg chg="modSld">
+      <pc:chgData name="Javier Bas Vicente" userId="96bf8a96-3310-496c-8c7e-8a087f977faa" providerId="ADAL" clId="{01F37B28-FECE-485C-BA1B-E2D29CFD8DE6}" dt="2025-11-03T09:26:20.273" v="11" actId="20577"/>
+      <pc:docMkLst>
+        <pc:docMk/>
+      </pc:docMkLst>
+      <pc:sldChg chg="modSp mod">
+        <pc:chgData name="Javier Bas Vicente" userId="96bf8a96-3310-496c-8c7e-8a087f977faa" providerId="ADAL" clId="{01F37B28-FECE-485C-BA1B-E2D29CFD8DE6}" dt="2025-11-03T08:36:38.606" v="2" actId="20577"/>
+        <pc:sldMkLst>
+          <pc:docMk/>
+          <pc:sldMk cId="2379344142" sldId="281"/>
+        </pc:sldMkLst>
         <pc:spChg chg="mod">
-          <ac:chgData name="Javier Bas Vicente" userId="96bf8a96-3310-496c-8c7e-8a087f977faa" providerId="ADAL" clId="{3C9ABCAB-493E-4D17-839E-F2056CFBE8FD}" dt="2023-10-31T15:25:06.659" v="1125" actId="6549"/>
+          <ac:chgData name="Javier Bas Vicente" userId="96bf8a96-3310-496c-8c7e-8a087f977faa" providerId="ADAL" clId="{01F37B28-FECE-485C-BA1B-E2D29CFD8DE6}" dt="2025-11-03T08:36:38.606" v="2" actId="20577"/>
           <ac:spMkLst>
             <pc:docMk/>
-            <pc:sldMk cId="59019250" sldId="300"/>
+            <pc:sldMk cId="2379344142" sldId="281"/>
             <ac:spMk id="3" creationId="{F7EF27C5-01B7-9F60-ECDA-A1F376586FC5}"/>
           </ac:spMkLst>
         </pc:spChg>
-        <pc:spChg chg="del">
-          <ac:chgData name="Javier Bas Vicente" userId="96bf8a96-3310-496c-8c7e-8a087f977faa" providerId="ADAL" clId="{3C9ABCAB-493E-4D17-839E-F2056CFBE8FD}" dt="2023-10-31T15:21:16.556" v="718" actId="478"/>
+      </pc:sldChg>
+      <pc:sldChg chg="modSp mod">
+        <pc:chgData name="Javier Bas Vicente" userId="96bf8a96-3310-496c-8c7e-8a087f977faa" providerId="ADAL" clId="{01F37B28-FECE-485C-BA1B-E2D29CFD8DE6}" dt="2025-11-03T08:37:46.722" v="6" actId="6549"/>
+        <pc:sldMkLst>
+          <pc:docMk/>
+          <pc:sldMk cId="3511692106" sldId="282"/>
+        </pc:sldMkLst>
+        <pc:spChg chg="mod">
+          <ac:chgData name="Javier Bas Vicente" userId="96bf8a96-3310-496c-8c7e-8a087f977faa" providerId="ADAL" clId="{01F37B28-FECE-485C-BA1B-E2D29CFD8DE6}" dt="2025-11-03T08:37:46.722" v="6" actId="6549"/>
           <ac:spMkLst>
             <pc:docMk/>
-            <pc:sldMk cId="59019250" sldId="300"/>
+            <pc:sldMk cId="3511692106" sldId="282"/>
+            <ac:spMk id="3" creationId="{F7EF27C5-01B7-9F60-ECDA-A1F376586FC5}"/>
+          </ac:spMkLst>
+        </pc:spChg>
+      </pc:sldChg>
+      <pc:sldChg chg="modSp mod">
+        <pc:chgData name="Javier Bas Vicente" userId="96bf8a96-3310-496c-8c7e-8a087f977faa" providerId="ADAL" clId="{01F37B28-FECE-485C-BA1B-E2D29CFD8DE6}" dt="2025-11-03T09:26:20.273" v="11" actId="20577"/>
+        <pc:sldMkLst>
+          <pc:docMk/>
+          <pc:sldMk cId="2946059860" sldId="288"/>
+        </pc:sldMkLst>
+        <pc:spChg chg="mod">
+          <ac:chgData name="Javier Bas Vicente" userId="96bf8a96-3310-496c-8c7e-8a087f977faa" providerId="ADAL" clId="{01F37B28-FECE-485C-BA1B-E2D29CFD8DE6}" dt="2025-11-03T09:26:20.273" v="11" actId="20577"/>
+          <ac:spMkLst>
+            <pc:docMk/>
+            <pc:sldMk cId="2946059860" sldId="288"/>
             <ac:spMk id="7" creationId="{22B2EC76-678F-F957-F964-E20A68DD6FF9}"/>
           </ac:spMkLst>
         </pc:spChg>
-        <pc:spChg chg="mod">
-          <ac:chgData name="Javier Bas Vicente" userId="96bf8a96-3310-496c-8c7e-8a087f977faa" providerId="ADAL" clId="{3C9ABCAB-493E-4D17-839E-F2056CFBE8FD}" dt="2023-10-31T15:25:36.421" v="1143" actId="1036"/>
-          <ac:spMkLst>
-            <pc:docMk/>
-            <pc:sldMk cId="59019250" sldId="300"/>
-            <ac:spMk id="12" creationId="{B4DA19C9-C5DC-5E6E-F21C-D9FC76E063EE}"/>
-          </ac:spMkLst>
-        </pc:spChg>
-        <pc:spChg chg="del">
-          <ac:chgData name="Javier Bas Vicente" userId="96bf8a96-3310-496c-8c7e-8a087f977faa" providerId="ADAL" clId="{3C9ABCAB-493E-4D17-839E-F2056CFBE8FD}" dt="2023-10-31T15:21:18.722" v="719" actId="478"/>
-          <ac:spMkLst>
-            <pc:docMk/>
-            <pc:sldMk cId="59019250" sldId="300"/>
-            <ac:spMk id="13" creationId="{3567DF27-2684-0050-C0DD-AAF72EAA15D8}"/>
-          </ac:spMkLst>
-        </pc:spChg>
-        <pc:spChg chg="mod">
-          <ac:chgData name="Javier Bas Vicente" userId="96bf8a96-3310-496c-8c7e-8a087f977faa" providerId="ADAL" clId="{3C9ABCAB-493E-4D17-839E-F2056CFBE8FD}" dt="2023-10-31T15:25:36.421" v="1143" actId="1036"/>
-          <ac:spMkLst>
-            <pc:docMk/>
-            <pc:sldMk cId="59019250" sldId="300"/>
-            <ac:spMk id="16" creationId="{167984DF-5D1C-E385-D180-E5B1AD8867FB}"/>
-          </ac:spMkLst>
-        </pc:spChg>
-        <pc:spChg chg="mod">
-          <ac:chgData name="Javier Bas Vicente" userId="96bf8a96-3310-496c-8c7e-8a087f977faa" providerId="ADAL" clId="{3C9ABCAB-493E-4D17-839E-F2056CFBE8FD}" dt="2023-10-31T15:25:36.421" v="1143" actId="1036"/>
-          <ac:spMkLst>
-            <pc:docMk/>
-            <pc:sldMk cId="59019250" sldId="300"/>
-            <ac:spMk id="20" creationId="{77723D12-E298-5276-D69B-3E8C18F03501}"/>
-          </ac:spMkLst>
-        </pc:spChg>
-        <pc:spChg chg="mod">
-          <ac:chgData name="Javier Bas Vicente" userId="96bf8a96-3310-496c-8c7e-8a087f977faa" providerId="ADAL" clId="{3C9ABCAB-493E-4D17-839E-F2056CFBE8FD}" dt="2023-10-31T15:25:36.421" v="1143" actId="1036"/>
-          <ac:spMkLst>
-            <pc:docMk/>
-            <pc:sldMk cId="59019250" sldId="300"/>
-            <ac:spMk id="21" creationId="{E810AA24-FBC5-9ECC-6E41-A52F7C872F31}"/>
-          </ac:spMkLst>
-        </pc:spChg>
-        <pc:spChg chg="mod">
-          <ac:chgData name="Javier Bas Vicente" userId="96bf8a96-3310-496c-8c7e-8a087f977faa" providerId="ADAL" clId="{3C9ABCAB-493E-4D17-839E-F2056CFBE8FD}" dt="2023-10-31T15:25:36.421" v="1143" actId="1036"/>
-          <ac:spMkLst>
-            <pc:docMk/>
-            <pc:sldMk cId="59019250" sldId="300"/>
-            <ac:spMk id="22" creationId="{E6B287B8-B69F-6039-592D-0C990309A52C}"/>
-          </ac:spMkLst>
-        </pc:spChg>
-        <pc:spChg chg="mod">
-          <ac:chgData name="Javier Bas Vicente" userId="96bf8a96-3310-496c-8c7e-8a087f977faa" providerId="ADAL" clId="{3C9ABCAB-493E-4D17-839E-F2056CFBE8FD}" dt="2023-10-31T15:25:36.421" v="1143" actId="1036"/>
-          <ac:spMkLst>
-            <pc:docMk/>
-            <pc:sldMk cId="59019250" sldId="300"/>
-            <ac:spMk id="23" creationId="{99E02092-4B79-9314-EFE8-F5077AB66630}"/>
-          </ac:spMkLst>
-        </pc:spChg>
-        <pc:picChg chg="mod">
-          <ac:chgData name="Javier Bas Vicente" userId="96bf8a96-3310-496c-8c7e-8a087f977faa" providerId="ADAL" clId="{3C9ABCAB-493E-4D17-839E-F2056CFBE8FD}" dt="2023-10-31T15:25:36.421" v="1143" actId="1036"/>
-          <ac:picMkLst>
-            <pc:docMk/>
-            <pc:sldMk cId="59019250" sldId="300"/>
-            <ac:picMk id="8" creationId="{1DA296CE-107F-EBC7-F9F9-596CE8402C39}"/>
-          </ac:picMkLst>
-        </pc:picChg>
-        <pc:picChg chg="del">
-          <ac:chgData name="Javier Bas Vicente" userId="96bf8a96-3310-496c-8c7e-8a087f977faa" providerId="ADAL" clId="{3C9ABCAB-493E-4D17-839E-F2056CFBE8FD}" dt="2023-10-31T15:21:15.150" v="717" actId="478"/>
-          <ac:picMkLst>
-            <pc:docMk/>
-            <pc:sldMk cId="59019250" sldId="300"/>
-            <ac:picMk id="11" creationId="{D6474E9B-2814-21BD-E486-F59921F3FDF6}"/>
-          </ac:picMkLst>
-        </pc:picChg>
-        <pc:cxnChg chg="mod">
-          <ac:chgData name="Javier Bas Vicente" userId="96bf8a96-3310-496c-8c7e-8a087f977faa" providerId="ADAL" clId="{3C9ABCAB-493E-4D17-839E-F2056CFBE8FD}" dt="2023-10-31T15:25:36.421" v="1143" actId="1036"/>
-          <ac:cxnSpMkLst>
-            <pc:docMk/>
-            <pc:sldMk cId="59019250" sldId="300"/>
-            <ac:cxnSpMk id="14" creationId="{22E80EF3-D563-F8AB-4632-9DA2DEC0C1A8}"/>
-          </ac:cxnSpMkLst>
-        </pc:cxnChg>
       </pc:sldChg>
     </pc:docChg>
   </pc:docChgLst>
@@ -859,7 +465,7 @@
           <a:p>
             <a:fld id="{B9B1DC7F-8587-4047-9A5D-1FCB6614CAE0}" type="datetimeFigureOut">
               <a:rPr lang="en-US" smtClean="0"/>
-              <a:t>11/4/2024</a:t>
+              <a:t>11/3/2025</a:t>
             </a:fld>
             <a:endParaRPr lang="en-US"/>
           </a:p>
@@ -1273,7 +879,7 @@
           <a:p>
             <a:fld id="{A7DB5662-7327-465C-9A70-AD96B7A8D67A}" type="datetimeFigureOut">
               <a:rPr lang="en-US" smtClean="0"/>
-              <a:t>11/4/2024</a:t>
+              <a:t>11/3/2025</a:t>
             </a:fld>
             <a:endParaRPr lang="en-US"/>
           </a:p>
@@ -1471,7 +1077,7 @@
           <a:p>
             <a:fld id="{A7DB5662-7327-465C-9A70-AD96B7A8D67A}" type="datetimeFigureOut">
               <a:rPr lang="en-US" smtClean="0"/>
-              <a:t>11/4/2024</a:t>
+              <a:t>11/3/2025</a:t>
             </a:fld>
             <a:endParaRPr lang="en-US"/>
           </a:p>
@@ -1679,7 +1285,7 @@
           <a:p>
             <a:fld id="{A7DB5662-7327-465C-9A70-AD96B7A8D67A}" type="datetimeFigureOut">
               <a:rPr lang="en-US" smtClean="0"/>
-              <a:t>11/4/2024</a:t>
+              <a:t>11/3/2025</a:t>
             </a:fld>
             <a:endParaRPr lang="en-US"/>
           </a:p>
@@ -1877,7 +1483,7 @@
           <a:p>
             <a:fld id="{A7DB5662-7327-465C-9A70-AD96B7A8D67A}" type="datetimeFigureOut">
               <a:rPr lang="en-US" smtClean="0"/>
-              <a:t>11/4/2024</a:t>
+              <a:t>11/3/2025</a:t>
             </a:fld>
             <a:endParaRPr lang="en-US"/>
           </a:p>
@@ -2152,7 +1758,7 @@
           <a:p>
             <a:fld id="{A7DB5662-7327-465C-9A70-AD96B7A8D67A}" type="datetimeFigureOut">
               <a:rPr lang="en-US" smtClean="0"/>
-              <a:t>11/4/2024</a:t>
+              <a:t>11/3/2025</a:t>
             </a:fld>
             <a:endParaRPr lang="en-US"/>
           </a:p>
@@ -2417,7 +2023,7 @@
           <a:p>
             <a:fld id="{A7DB5662-7327-465C-9A70-AD96B7A8D67A}" type="datetimeFigureOut">
               <a:rPr lang="en-US" smtClean="0"/>
-              <a:t>11/4/2024</a:t>
+              <a:t>11/3/2025</a:t>
             </a:fld>
             <a:endParaRPr lang="en-US"/>
           </a:p>
@@ -2829,7 +2435,7 @@
           <a:p>
             <a:fld id="{A7DB5662-7327-465C-9A70-AD96B7A8D67A}" type="datetimeFigureOut">
               <a:rPr lang="en-US" smtClean="0"/>
-              <a:t>11/4/2024</a:t>
+              <a:t>11/3/2025</a:t>
             </a:fld>
             <a:endParaRPr lang="en-US"/>
           </a:p>
@@ -2970,7 +2576,7 @@
           <a:p>
             <a:fld id="{A7DB5662-7327-465C-9A70-AD96B7A8D67A}" type="datetimeFigureOut">
               <a:rPr lang="en-US" smtClean="0"/>
-              <a:t>11/4/2024</a:t>
+              <a:t>11/3/2025</a:t>
             </a:fld>
             <a:endParaRPr lang="en-US"/>
           </a:p>
@@ -3083,7 +2689,7 @@
           <a:p>
             <a:fld id="{A7DB5662-7327-465C-9A70-AD96B7A8D67A}" type="datetimeFigureOut">
               <a:rPr lang="en-US" smtClean="0"/>
-              <a:t>11/4/2024</a:t>
+              <a:t>11/3/2025</a:t>
             </a:fld>
             <a:endParaRPr lang="en-US"/>
           </a:p>
@@ -3394,7 +3000,7 @@
           <a:p>
             <a:fld id="{A7DB5662-7327-465C-9A70-AD96B7A8D67A}" type="datetimeFigureOut">
               <a:rPr lang="en-US" smtClean="0"/>
-              <a:t>11/4/2024</a:t>
+              <a:t>11/3/2025</a:t>
             </a:fld>
             <a:endParaRPr lang="en-US"/>
           </a:p>
@@ -3682,7 +3288,7 @@
           <a:p>
             <a:fld id="{A7DB5662-7327-465C-9A70-AD96B7A8D67A}" type="datetimeFigureOut">
               <a:rPr lang="en-US" smtClean="0"/>
-              <a:t>11/4/2024</a:t>
+              <a:t>11/3/2025</a:t>
             </a:fld>
             <a:endParaRPr lang="en-US"/>
           </a:p>
@@ -3923,7 +3529,7 @@
           <a:p>
             <a:fld id="{A7DB5662-7327-465C-9A70-AD96B7A8D67A}" type="datetimeFigureOut">
               <a:rPr lang="en-US" smtClean="0"/>
-              <a:t>11/4/2024</a:t>
+              <a:t>11/3/2025</a:t>
             </a:fld>
             <a:endParaRPr lang="en-US"/>
           </a:p>
@@ -22866,7 +22472,7 @@
               <a:rPr lang="en-US" dirty="0">
                 <a:latin typeface="+mj-lt"/>
               </a:rPr>
-              <a:t>A better classifier of </a:t>
+              <a:t>A better classifier for </a:t>
             </a:r>
             <a:r>
               <a:rPr lang="en-US" i="1" u="sng" dirty="0">
@@ -33209,7 +32815,7 @@
               <a:rPr lang="en-US" sz="2000" dirty="0">
                 <a:latin typeface="+mj-lt"/>
               </a:rPr>
-              <a:t>s are plugged into the regression, they reproduce the sample labels as closely as possible.</a:t>
+              <a:t>s are plugged in into the regression, they reproduce the sample labels as closely as possible.</a:t>
             </a:r>
           </a:p>
           <a:p>
@@ -34065,8 +33671,8 @@
           </a:graphicData>
         </a:graphic>
       </p:graphicFrame>
-      <mc:AlternateContent xmlns:mc="http://schemas.openxmlformats.org/markup-compatibility/2006">
-        <mc:Choice xmlns:a14="http://schemas.microsoft.com/office/drawing/2010/main" Requires="a14">
+      <mc:AlternateContent xmlns:mc="http://schemas.openxmlformats.org/markup-compatibility/2006" xmlns:a14="http://schemas.microsoft.com/office/drawing/2010/main">
+        <mc:Choice Requires="a14">
           <p:sp>
             <p:nvSpPr>
               <p:cNvPr id="8" name="TextBox 7">
@@ -34256,7 +33862,7 @@
             </p:txBody>
           </p:sp>
         </mc:Choice>
-        <mc:Fallback>
+        <mc:Fallback xmlns="">
           <p:sp>
             <p:nvSpPr>
               <p:cNvPr id="8" name="TextBox 7">
@@ -34361,8 +33967,8 @@
           </a:p>
         </p:txBody>
       </p:sp>
-      <mc:AlternateContent xmlns:mc="http://schemas.openxmlformats.org/markup-compatibility/2006" xmlns:a14="http://schemas.microsoft.com/office/drawing/2010/main">
-        <mc:Choice Requires="a14">
+      <mc:AlternateContent xmlns:mc="http://schemas.openxmlformats.org/markup-compatibility/2006">
+        <mc:Choice xmlns:a14="http://schemas.microsoft.com/office/drawing/2010/main" Requires="a14">
           <p:sp>
             <p:nvSpPr>
               <p:cNvPr id="3" name="Content Placeholder 2">
@@ -34523,7 +34129,7 @@
                   <a:rPr lang="en-US" sz="2000" dirty="0">
                     <a:latin typeface="+mj-lt"/>
                   </a:rPr>
-                  <a:t>When the classes are well-separated, linear regression estimates are less stable</a:t>
+                  <a:t>When the classes are well-separated, LDA estimates are less stable</a:t>
                 </a:r>
               </a:p>
               <a:p>
@@ -34583,7 +34189,7 @@
             </p:txBody>
           </p:sp>
         </mc:Choice>
-        <mc:Fallback xmlns="">
+        <mc:Fallback>
           <p:sp>
             <p:nvSpPr>
               <p:cNvPr id="3" name="Content Placeholder 2">
